--- a/WHR2026_Indonesia_Demas.pptx
+++ b/WHR2026_Indonesia_Demas.pptx
@@ -6016,7 +6016,7 @@
         <p:spPr>
           <a:xfrm>
             <a:off x="548640" y="1138264"/>
-            <a:ext cx="5486400" cy="813336"/>
+            <a:ext cx="10874894" cy="969258"/>
           </a:xfrm>
           <a:prstGeom prst="rect">
             <a:avLst/>
@@ -6035,6 +6035,17 @@
               <a:buNone/>
             </a:pPr>
             <a:r>
+              <a:rPr lang="en-US" sz="1200" dirty="0" err="1">
+                <a:solidFill>
+                  <a:srgbClr val="1B1F30"/>
+                </a:solidFill>
+                <a:latin typeface="Arial" pitchFamily="34" charset="0"/>
+                <a:ea typeface="Arial" pitchFamily="34" charset="-122"/>
+                <a:cs typeface="Arial" pitchFamily="34" charset="-120"/>
+              </a:rPr>
+              <a:t>Analisis</a:t>
+            </a:r>
+            <a:r>
               <a:rPr lang="en-US" sz="1200" dirty="0">
                 <a:solidFill>
                   <a:srgbClr val="1B1F30"/>
@@ -6043,7 +6054,447 @@
                 <a:ea typeface="Arial" pitchFamily="34" charset="-122"/>
                 <a:cs typeface="Arial" pitchFamily="34" charset="-120"/>
               </a:rPr>
-              <a:t>Analisis ini menggunakan data World Happiness Report (WHR) 2026 untuk mengukur tingkat kebahagiaan Indonesia selama periode 2021–2025, dengan Indonesia sebagai fokus negara.</a:t>
+              <a:t> </a:t>
+            </a:r>
+            <a:r>
+              <a:rPr lang="en-US" sz="1200" dirty="0" err="1">
+                <a:solidFill>
+                  <a:srgbClr val="1B1F30"/>
+                </a:solidFill>
+                <a:latin typeface="Arial" pitchFamily="34" charset="0"/>
+                <a:ea typeface="Arial" pitchFamily="34" charset="-122"/>
+                <a:cs typeface="Arial" pitchFamily="34" charset="-120"/>
+              </a:rPr>
+              <a:t>ini</a:t>
+            </a:r>
+            <a:r>
+              <a:rPr lang="en-US" sz="1200" dirty="0">
+                <a:solidFill>
+                  <a:srgbClr val="1B1F30"/>
+                </a:solidFill>
+                <a:latin typeface="Arial" pitchFamily="34" charset="0"/>
+                <a:ea typeface="Arial" pitchFamily="34" charset="-122"/>
+                <a:cs typeface="Arial" pitchFamily="34" charset="-120"/>
+              </a:rPr>
+              <a:t> </a:t>
+            </a:r>
+            <a:r>
+              <a:rPr lang="en-US" sz="1200" dirty="0" err="1">
+                <a:solidFill>
+                  <a:srgbClr val="1B1F30"/>
+                </a:solidFill>
+                <a:latin typeface="Arial" pitchFamily="34" charset="0"/>
+                <a:ea typeface="Arial" pitchFamily="34" charset="-122"/>
+                <a:cs typeface="Arial" pitchFamily="34" charset="-120"/>
+              </a:rPr>
+              <a:t>menggunakan</a:t>
+            </a:r>
+            <a:r>
+              <a:rPr lang="en-US" sz="1200" dirty="0">
+                <a:solidFill>
+                  <a:srgbClr val="1B1F30"/>
+                </a:solidFill>
+                <a:latin typeface="Arial" pitchFamily="34" charset="0"/>
+                <a:ea typeface="Arial" pitchFamily="34" charset="-122"/>
+                <a:cs typeface="Arial" pitchFamily="34" charset="-120"/>
+              </a:rPr>
+              <a:t> data World Happiness Report (WHR) 2026 </a:t>
+            </a:r>
+            <a:r>
+              <a:rPr lang="en-US" sz="1200" dirty="0" err="1">
+                <a:solidFill>
+                  <a:srgbClr val="1B1F30"/>
+                </a:solidFill>
+                <a:latin typeface="Arial" pitchFamily="34" charset="0"/>
+                <a:ea typeface="Arial" pitchFamily="34" charset="-122"/>
+                <a:cs typeface="Arial" pitchFamily="34" charset="-120"/>
+              </a:rPr>
+              <a:t>untuk</a:t>
+            </a:r>
+            <a:r>
+              <a:rPr lang="en-US" sz="1200" dirty="0">
+                <a:solidFill>
+                  <a:srgbClr val="1B1F30"/>
+                </a:solidFill>
+                <a:latin typeface="Arial" pitchFamily="34" charset="0"/>
+                <a:ea typeface="Arial" pitchFamily="34" charset="-122"/>
+                <a:cs typeface="Arial" pitchFamily="34" charset="-120"/>
+              </a:rPr>
+              <a:t> </a:t>
+            </a:r>
+            <a:r>
+              <a:rPr lang="en-US" sz="1200" dirty="0" err="1">
+                <a:solidFill>
+                  <a:srgbClr val="1B1F30"/>
+                </a:solidFill>
+                <a:latin typeface="Arial" pitchFamily="34" charset="0"/>
+                <a:ea typeface="Arial" pitchFamily="34" charset="-122"/>
+                <a:cs typeface="Arial" pitchFamily="34" charset="-120"/>
+              </a:rPr>
+              <a:t>mengkaji</a:t>
+            </a:r>
+            <a:r>
+              <a:rPr lang="en-US" sz="1200" dirty="0">
+                <a:solidFill>
+                  <a:srgbClr val="1B1F30"/>
+                </a:solidFill>
+                <a:latin typeface="Arial" pitchFamily="34" charset="0"/>
+                <a:ea typeface="Arial" pitchFamily="34" charset="-122"/>
+                <a:cs typeface="Arial" pitchFamily="34" charset="-120"/>
+              </a:rPr>
+              <a:t> </a:t>
+            </a:r>
+            <a:r>
+              <a:rPr lang="en-US" sz="1200" dirty="0" err="1">
+                <a:solidFill>
+                  <a:srgbClr val="1B1F30"/>
+                </a:solidFill>
+                <a:latin typeface="Arial" pitchFamily="34" charset="0"/>
+                <a:ea typeface="Arial" pitchFamily="34" charset="-122"/>
+                <a:cs typeface="Arial" pitchFamily="34" charset="-120"/>
+              </a:rPr>
+              <a:t>perkembangan</a:t>
+            </a:r>
+            <a:r>
+              <a:rPr lang="en-US" sz="1200" dirty="0">
+                <a:solidFill>
+                  <a:srgbClr val="1B1F30"/>
+                </a:solidFill>
+                <a:latin typeface="Arial" pitchFamily="34" charset="0"/>
+                <a:ea typeface="Arial" pitchFamily="34" charset="-122"/>
+                <a:cs typeface="Arial" pitchFamily="34" charset="-120"/>
+              </a:rPr>
+              <a:t> </a:t>
+            </a:r>
+            <a:r>
+              <a:rPr lang="en-US" sz="1200" dirty="0" err="1">
+                <a:solidFill>
+                  <a:srgbClr val="1B1F30"/>
+                </a:solidFill>
+                <a:latin typeface="Arial" pitchFamily="34" charset="0"/>
+                <a:ea typeface="Arial" pitchFamily="34" charset="-122"/>
+                <a:cs typeface="Arial" pitchFamily="34" charset="-120"/>
+              </a:rPr>
+              <a:t>tingkat</a:t>
+            </a:r>
+            <a:r>
+              <a:rPr lang="en-US" sz="1200" dirty="0">
+                <a:solidFill>
+                  <a:srgbClr val="1B1F30"/>
+                </a:solidFill>
+                <a:latin typeface="Arial" pitchFamily="34" charset="0"/>
+                <a:ea typeface="Arial" pitchFamily="34" charset="-122"/>
+                <a:cs typeface="Arial" pitchFamily="34" charset="-120"/>
+              </a:rPr>
+              <a:t> </a:t>
+            </a:r>
+            <a:r>
+              <a:rPr lang="en-US" sz="1200" dirty="0" err="1">
+                <a:solidFill>
+                  <a:srgbClr val="1B1F30"/>
+                </a:solidFill>
+                <a:latin typeface="Arial" pitchFamily="34" charset="0"/>
+                <a:ea typeface="Arial" pitchFamily="34" charset="-122"/>
+                <a:cs typeface="Arial" pitchFamily="34" charset="-120"/>
+              </a:rPr>
+              <a:t>kebahagiaan</a:t>
+            </a:r>
+            <a:r>
+              <a:rPr lang="en-US" sz="1200" dirty="0">
+                <a:solidFill>
+                  <a:srgbClr val="1B1F30"/>
+                </a:solidFill>
+                <a:latin typeface="Arial" pitchFamily="34" charset="0"/>
+                <a:ea typeface="Arial" pitchFamily="34" charset="-122"/>
+                <a:cs typeface="Arial" pitchFamily="34" charset="-120"/>
+              </a:rPr>
+              <a:t> Indonesia </a:t>
+            </a:r>
+            <a:r>
+              <a:rPr lang="en-US" sz="1200" dirty="0" err="1">
+                <a:solidFill>
+                  <a:srgbClr val="1B1F30"/>
+                </a:solidFill>
+                <a:latin typeface="Arial" pitchFamily="34" charset="0"/>
+                <a:ea typeface="Arial" pitchFamily="34" charset="-122"/>
+                <a:cs typeface="Arial" pitchFamily="34" charset="-120"/>
+              </a:rPr>
+              <a:t>selama</a:t>
+            </a:r>
+            <a:r>
+              <a:rPr lang="en-US" sz="1200" dirty="0">
+                <a:solidFill>
+                  <a:srgbClr val="1B1F30"/>
+                </a:solidFill>
+                <a:latin typeface="Arial" pitchFamily="34" charset="0"/>
+                <a:ea typeface="Arial" pitchFamily="34" charset="-122"/>
+                <a:cs typeface="Arial" pitchFamily="34" charset="-120"/>
+              </a:rPr>
+              <a:t> </a:t>
+            </a:r>
+            <a:r>
+              <a:rPr lang="en-US" sz="1200" dirty="0" err="1">
+                <a:solidFill>
+                  <a:srgbClr val="1B1F30"/>
+                </a:solidFill>
+                <a:latin typeface="Arial" pitchFamily="34" charset="0"/>
+                <a:ea typeface="Arial" pitchFamily="34" charset="-122"/>
+                <a:cs typeface="Arial" pitchFamily="34" charset="-120"/>
+              </a:rPr>
+              <a:t>periode</a:t>
+            </a:r>
+            <a:r>
+              <a:rPr lang="en-US" sz="1200" dirty="0">
+                <a:solidFill>
+                  <a:srgbClr val="1B1F30"/>
+                </a:solidFill>
+                <a:latin typeface="Arial" pitchFamily="34" charset="0"/>
+                <a:ea typeface="Arial" pitchFamily="34" charset="-122"/>
+                <a:cs typeface="Arial" pitchFamily="34" charset="-120"/>
+              </a:rPr>
+              <a:t> 2021-2025. Indonesia </a:t>
+            </a:r>
+            <a:r>
+              <a:rPr lang="en-US" sz="1200" dirty="0" err="1">
+                <a:solidFill>
+                  <a:srgbClr val="1B1F30"/>
+                </a:solidFill>
+                <a:latin typeface="Arial" pitchFamily="34" charset="0"/>
+                <a:ea typeface="Arial" pitchFamily="34" charset="-122"/>
+                <a:cs typeface="Arial" pitchFamily="34" charset="-120"/>
+              </a:rPr>
+              <a:t>menjadi</a:t>
+            </a:r>
+            <a:r>
+              <a:rPr lang="en-US" sz="1200" dirty="0">
+                <a:solidFill>
+                  <a:srgbClr val="1B1F30"/>
+                </a:solidFill>
+                <a:latin typeface="Arial" pitchFamily="34" charset="0"/>
+                <a:ea typeface="Arial" pitchFamily="34" charset="-122"/>
+                <a:cs typeface="Arial" pitchFamily="34" charset="-120"/>
+              </a:rPr>
+              <a:t> </a:t>
+            </a:r>
+            <a:r>
+              <a:rPr lang="en-US" sz="1200" dirty="0" err="1">
+                <a:solidFill>
+                  <a:srgbClr val="1B1F30"/>
+                </a:solidFill>
+                <a:latin typeface="Arial" pitchFamily="34" charset="0"/>
+                <a:ea typeface="Arial" pitchFamily="34" charset="-122"/>
+                <a:cs typeface="Arial" pitchFamily="34" charset="-120"/>
+              </a:rPr>
+              <a:t>fokus</a:t>
+            </a:r>
+            <a:r>
+              <a:rPr lang="en-US" sz="1200" dirty="0">
+                <a:solidFill>
+                  <a:srgbClr val="1B1F30"/>
+                </a:solidFill>
+                <a:latin typeface="Arial" pitchFamily="34" charset="0"/>
+                <a:ea typeface="Arial" pitchFamily="34" charset="-122"/>
+                <a:cs typeface="Arial" pitchFamily="34" charset="-120"/>
+              </a:rPr>
+              <a:t> </a:t>
+            </a:r>
+            <a:r>
+              <a:rPr lang="en-US" sz="1200" dirty="0" err="1">
+                <a:solidFill>
+                  <a:srgbClr val="1B1F30"/>
+                </a:solidFill>
+                <a:latin typeface="Arial" pitchFamily="34" charset="0"/>
+                <a:ea typeface="Arial" pitchFamily="34" charset="-122"/>
+                <a:cs typeface="Arial" pitchFamily="34" charset="-120"/>
+              </a:rPr>
+              <a:t>utama</a:t>
+            </a:r>
+            <a:r>
+              <a:rPr lang="en-US" sz="1200" dirty="0">
+                <a:solidFill>
+                  <a:srgbClr val="1B1F30"/>
+                </a:solidFill>
+                <a:latin typeface="Arial" pitchFamily="34" charset="0"/>
+                <a:ea typeface="Arial" pitchFamily="34" charset="-122"/>
+                <a:cs typeface="Arial" pitchFamily="34" charset="-120"/>
+              </a:rPr>
+              <a:t> </a:t>
+            </a:r>
+            <a:r>
+              <a:rPr lang="en-US" sz="1200" dirty="0" err="1">
+                <a:solidFill>
+                  <a:srgbClr val="1B1F30"/>
+                </a:solidFill>
+                <a:latin typeface="Arial" pitchFamily="34" charset="0"/>
+                <a:ea typeface="Arial" pitchFamily="34" charset="-122"/>
+                <a:cs typeface="Arial" pitchFamily="34" charset="-120"/>
+              </a:rPr>
+              <a:t>analisis</a:t>
+            </a:r>
+            <a:r>
+              <a:rPr lang="en-US" sz="1200" dirty="0">
+                <a:solidFill>
+                  <a:srgbClr val="1B1F30"/>
+                </a:solidFill>
+                <a:latin typeface="Arial" pitchFamily="34" charset="0"/>
+                <a:ea typeface="Arial" pitchFamily="34" charset="-122"/>
+                <a:cs typeface="Arial" pitchFamily="34" charset="-120"/>
+              </a:rPr>
+              <a:t>, </a:t>
+            </a:r>
+            <a:r>
+              <a:rPr lang="en-US" sz="1200" dirty="0" err="1">
+                <a:solidFill>
+                  <a:srgbClr val="1B1F30"/>
+                </a:solidFill>
+                <a:latin typeface="Arial" pitchFamily="34" charset="0"/>
+                <a:ea typeface="Arial" pitchFamily="34" charset="-122"/>
+                <a:cs typeface="Arial" pitchFamily="34" charset="-120"/>
+              </a:rPr>
+              <a:t>dengan</a:t>
+            </a:r>
+            <a:r>
+              <a:rPr lang="en-US" sz="1200" dirty="0">
+                <a:solidFill>
+                  <a:srgbClr val="1B1F30"/>
+                </a:solidFill>
+                <a:latin typeface="Arial" pitchFamily="34" charset="0"/>
+                <a:ea typeface="Arial" pitchFamily="34" charset="-122"/>
+                <a:cs typeface="Arial" pitchFamily="34" charset="-120"/>
+              </a:rPr>
+              <a:t> Life Evaluation </a:t>
+            </a:r>
+            <a:r>
+              <a:rPr lang="en-US" sz="1200" dirty="0" err="1">
+                <a:solidFill>
+                  <a:srgbClr val="1B1F30"/>
+                </a:solidFill>
+                <a:latin typeface="Arial" pitchFamily="34" charset="0"/>
+                <a:ea typeface="Arial" pitchFamily="34" charset="-122"/>
+                <a:cs typeface="Arial" pitchFamily="34" charset="-120"/>
+              </a:rPr>
+              <a:t>sebagai</a:t>
+            </a:r>
+            <a:r>
+              <a:rPr lang="en-US" sz="1200" dirty="0">
+                <a:solidFill>
+                  <a:srgbClr val="1B1F30"/>
+                </a:solidFill>
+                <a:latin typeface="Arial" pitchFamily="34" charset="0"/>
+                <a:ea typeface="Arial" pitchFamily="34" charset="-122"/>
+                <a:cs typeface="Arial" pitchFamily="34" charset="-120"/>
+              </a:rPr>
+              <a:t> </a:t>
+            </a:r>
+            <a:r>
+              <a:rPr lang="en-US" sz="1200" dirty="0" err="1">
+                <a:solidFill>
+                  <a:srgbClr val="1B1F30"/>
+                </a:solidFill>
+                <a:latin typeface="Arial" pitchFamily="34" charset="0"/>
+                <a:ea typeface="Arial" pitchFamily="34" charset="-122"/>
+                <a:cs typeface="Arial" pitchFamily="34" charset="-120"/>
+              </a:rPr>
+              <a:t>indikator</a:t>
+            </a:r>
+            <a:r>
+              <a:rPr lang="en-US" sz="1200" dirty="0">
+                <a:solidFill>
+                  <a:srgbClr val="1B1F30"/>
+                </a:solidFill>
+                <a:latin typeface="Arial" pitchFamily="34" charset="0"/>
+                <a:ea typeface="Arial" pitchFamily="34" charset="-122"/>
+                <a:cs typeface="Arial" pitchFamily="34" charset="-120"/>
+              </a:rPr>
+              <a:t> </a:t>
+            </a:r>
+            <a:r>
+              <a:rPr lang="en-US" sz="1200" dirty="0" err="1">
+                <a:solidFill>
+                  <a:srgbClr val="1B1F30"/>
+                </a:solidFill>
+                <a:latin typeface="Arial" pitchFamily="34" charset="0"/>
+                <a:ea typeface="Arial" pitchFamily="34" charset="-122"/>
+                <a:cs typeface="Arial" pitchFamily="34" charset="-120"/>
+              </a:rPr>
+              <a:t>utama</a:t>
+            </a:r>
+            <a:r>
+              <a:rPr lang="en-US" sz="1200" dirty="0">
+                <a:solidFill>
+                  <a:srgbClr val="1B1F30"/>
+                </a:solidFill>
+                <a:latin typeface="Arial" pitchFamily="34" charset="0"/>
+                <a:ea typeface="Arial" pitchFamily="34" charset="-122"/>
+                <a:cs typeface="Arial" pitchFamily="34" charset="-120"/>
+              </a:rPr>
+              <a:t> dan </a:t>
+            </a:r>
+            <a:r>
+              <a:rPr lang="en-US" sz="1200" dirty="0" err="1">
+                <a:solidFill>
+                  <a:srgbClr val="1B1F30"/>
+                </a:solidFill>
+                <a:latin typeface="Arial" pitchFamily="34" charset="0"/>
+                <a:ea typeface="Arial" pitchFamily="34" charset="-122"/>
+                <a:cs typeface="Arial" pitchFamily="34" charset="-120"/>
+              </a:rPr>
+              <a:t>perbandingan</a:t>
+            </a:r>
+            <a:r>
+              <a:rPr lang="en-US" sz="1200" dirty="0">
+                <a:solidFill>
+                  <a:srgbClr val="1B1F30"/>
+                </a:solidFill>
+                <a:latin typeface="Arial" pitchFamily="34" charset="0"/>
+                <a:ea typeface="Arial" pitchFamily="34" charset="-122"/>
+                <a:cs typeface="Arial" pitchFamily="34" charset="-120"/>
+              </a:rPr>
+              <a:t> </a:t>
+            </a:r>
+            <a:r>
+              <a:rPr lang="en-US" sz="1200" dirty="0" err="1">
+                <a:solidFill>
+                  <a:srgbClr val="1B1F30"/>
+                </a:solidFill>
+                <a:latin typeface="Arial" pitchFamily="34" charset="0"/>
+                <a:ea typeface="Arial" pitchFamily="34" charset="-122"/>
+                <a:cs typeface="Arial" pitchFamily="34" charset="-120"/>
+              </a:rPr>
+              <a:t>terhadap</a:t>
+            </a:r>
+            <a:r>
+              <a:rPr lang="en-US" sz="1200" dirty="0">
+                <a:solidFill>
+                  <a:srgbClr val="1B1F30"/>
+                </a:solidFill>
+                <a:latin typeface="Arial" pitchFamily="34" charset="0"/>
+                <a:ea typeface="Arial" pitchFamily="34" charset="-122"/>
+                <a:cs typeface="Arial" pitchFamily="34" charset="-120"/>
+              </a:rPr>
+              <a:t> negara ASEAN </a:t>
+            </a:r>
+            <a:r>
+              <a:rPr lang="en-US" sz="1200" dirty="0" err="1">
+                <a:solidFill>
+                  <a:srgbClr val="1B1F30"/>
+                </a:solidFill>
+                <a:latin typeface="Arial" pitchFamily="34" charset="0"/>
+                <a:ea typeface="Arial" pitchFamily="34" charset="-122"/>
+                <a:cs typeface="Arial" pitchFamily="34" charset="-120"/>
+              </a:rPr>
+              <a:t>serta</a:t>
+            </a:r>
+            <a:r>
+              <a:rPr lang="en-US" sz="1200" dirty="0">
+                <a:solidFill>
+                  <a:srgbClr val="1B1F30"/>
+                </a:solidFill>
+                <a:latin typeface="Arial" pitchFamily="34" charset="0"/>
+                <a:ea typeface="Arial" pitchFamily="34" charset="-122"/>
+                <a:cs typeface="Arial" pitchFamily="34" charset="-120"/>
+              </a:rPr>
+              <a:t> rata-rata global.</a:t>
             </a:r>
             <a:endParaRPr lang="en-US" sz="1200" dirty="0"/>
           </a:p>
